--- a/dist/초2/체육·보건·안전/놀이와협력/초2_체육·보건·안전_놀이와협력_01_규칙있는놀이_학생용.pptx
+++ b/dist/초2/체육·보건·안전/놀이와협력/초2_체육·보건·안전_놀이와협력_01_규칙있는놀이_학생용.pptx
@@ -114,34 +114,34 @@
   <p:extLst>
     <p:ext uri="{521415D9-36F7-43E2-AB2F-B90AF26B5E84}">
       <p14:sectionLst xmlns:p14="http://schemas.microsoft.com/office/powerpoint/2010/main">
-        <p14:section name="도입" id="{3cdadfff-1b82-fd04-e75b-a7e311d6cd13}">
+        <p14:section name="도입" id="{5f685f18-4914-c73a-9414-055aa2d8e3ca}">
           <p14:sldIdLst>
             <p14:sldId id="256"/>
             <p14:sldId id="257"/>
           </p14:sldIdLst>
         </p14:section>
-        <p14:section name="개념" id="{ca723c3f-a227-0e21-1b61-258394805f9d}">
+        <p14:section name="개념" id="{4bcbfbbe-6464-71ff-c71f-926889c11379}">
           <p14:sldIdLst>
             <p14:sldId id="258"/>
           </p14:sldIdLst>
         </p14:section>
-        <p14:section name="연습" id="{a035ef57-bb64-a5e4-42e5-1711501ddbf1}">
+        <p14:section name="연습" id="{bbd5d604-6218-7355-4179-65ac7f16380f}">
           <p14:sldIdLst>
             <p14:sldId id="259"/>
             <p14:sldId id="260"/>
           </p14:sldIdLst>
         </p14:section>
-        <p14:section name="확인" id="{701a9f49-2057-7fef-cd9f-075868f898fb}">
+        <p14:section name="확인" id="{fd128eb5-3017-310c-7c34-a02e01e76ca4}">
           <p14:sldIdLst>
             <p14:sldId id="261"/>
           </p14:sldIdLst>
         </p14:section>
-        <p14:section name="정리" id="{9a4ba93a-d035-2332-8381-2501fb52fe04}">
+        <p14:section name="정리" id="{cd2de998-73ab-40c9-bfc7-12a433557e56}">
           <p14:sldIdLst>
             <p14:sldId id="262"/>
           </p14:sldIdLst>
         </p14:section>
-        <p14:section name="보충" id="{3e55645b-3214-71b8-9772-949179dc9c90}">
+        <p14:section name="보충" id="{59f927ec-36f6-1e44-a330-66b35bf76300}">
           <p14:sldIdLst>
             <p14:sldId id="263"/>
           </p14:sldIdLst>
